--- a/curriculum/M02/W08/L03/slides.pptx
+++ b/curriculum/M02/W08/L03/slides.pptx
@@ -11142,11 +11142,40 @@
                 <a:ea typeface="Malgun Gothic"/>
                 <a:cs typeface="Malgun Gothic"/>
               </a:rPr>
-              <a:t>가 된다. Ceramide는 모든 sphingolipid의 공통 핵이다. 2. Ceramide에 </a:t>
-            </a:r>
+              <a:t>가 된다. Ceramide는 모든 sphingolipid의 공통 핵이다.</a:t>
+            </a:r>
+          </a:p>
+          <a:p>
+            <a:pPr>
+              <a:spcAft>
+                <a:spcPts val="900"/>
+              </a:spcAft>
+            </a:pPr>
             <a:r>
               <a:rPr sz="1800" b="1" i="0">
                 <a:solidFill>
+                  <a:srgbClr val="F2B705"/>
+                </a:solidFill>
+                <a:latin typeface="Malgun Gothic"/>
+                <a:ea typeface="Malgun Gothic"/>
+                <a:cs typeface="Malgun Gothic"/>
+              </a:rPr>
+              <a:t>•  </a:t>
+            </a:r>
+            <a:r>
+              <a:rPr sz="1800" b="0" i="0">
+                <a:solidFill>
+                  <a:srgbClr val="11202B"/>
+                </a:solidFill>
+                <a:latin typeface="Malgun Gothic"/>
+                <a:ea typeface="Malgun Gothic"/>
+                <a:cs typeface="Malgun Gothic"/>
+              </a:rPr>
+              <a:t>2. Ceramide에 </a:t>
+            </a:r>
+            <a:r>
+              <a:rPr sz="1800" b="1" i="0">
+                <a:solidFill>
                   <a:srgbClr val="11202B"/>
                 </a:solidFill>
                 <a:latin typeface="Malgun Gothic"/>
@@ -11186,7 +11215,36 @@
                 <a:ea typeface="Malgun Gothic"/>
                 <a:cs typeface="Malgun Gothic"/>
               </a:rPr>
-              <a:t>이 된다. Sphingolipid 가운데 인산을 가진 유일한 분자다. 3. Ceramide에 </a:t>
+              <a:t>이 된다. Sphingolipid 가운데 인산을 가진 유일한 분자다.</a:t>
+            </a:r>
+          </a:p>
+          <a:p>
+            <a:pPr>
+              <a:spcAft>
+                <a:spcPts val="900"/>
+              </a:spcAft>
+            </a:pPr>
+            <a:r>
+              <a:rPr sz="1800" b="1" i="0">
+                <a:solidFill>
+                  <a:srgbClr val="F2B705"/>
+                </a:solidFill>
+                <a:latin typeface="Malgun Gothic"/>
+                <a:ea typeface="Malgun Gothic"/>
+                <a:cs typeface="Malgun Gothic"/>
+              </a:rPr>
+              <a:t>•  </a:t>
+            </a:r>
+            <a:r>
+              <a:rPr sz="1800" b="0" i="0">
+                <a:solidFill>
+                  <a:srgbClr val="11202B"/>
+                </a:solidFill>
+                <a:latin typeface="Malgun Gothic"/>
+                <a:ea typeface="Malgun Gothic"/>
+                <a:cs typeface="Malgun Gothic"/>
+              </a:rPr>
+              <a:t>3. Ceramide에 </a:t>
             </a:r>
             <a:r>
               <a:rPr sz="1800" b="1" i="0">
@@ -11950,6 +12008,24 @@
               </a:rPr>
               <a:t>Rate-limiting step이다.</a:t>
             </a:r>
+          </a:p>
+          <a:p>
+            <a:pPr>
+              <a:spcAft>
+                <a:spcPts val="900"/>
+              </a:spcAft>
+            </a:pPr>
+            <a:r>
+              <a:rPr sz="1400" b="1" i="0">
+                <a:solidFill>
+                  <a:srgbClr val="F2B705"/>
+                </a:solidFill>
+                <a:latin typeface="Malgun Gothic"/>
+                <a:ea typeface="Malgun Gothic"/>
+                <a:cs typeface="Malgun Gothic"/>
+              </a:rPr>
+              <a:t>•  </a:t>
+            </a:r>
             <a:r>
               <a:rPr sz="1400" b="0" i="0">
                 <a:solidFill>
@@ -11959,7 +12035,65 @@
                 <a:ea typeface="Malgun Gothic"/>
                 <a:cs typeface="Malgun Gothic"/>
               </a:rPr>
-              <a:t> 2. NADPH가 환원해 sphinganine(dihydrosphingosine)이 된다. 3. 지방산 acyl-CoA가 아미노기에 붙어 dihydroceramide가 된다. 4. FAD 의존 desaturase가 이중결합을 넣어 </a:t>
+              <a:t>2. NADPH가 환원해 sphinganine(dihydrosphingosine)이 된다.</a:t>
+            </a:r>
+          </a:p>
+          <a:p>
+            <a:pPr>
+              <a:spcAft>
+                <a:spcPts val="900"/>
+              </a:spcAft>
+            </a:pPr>
+            <a:r>
+              <a:rPr sz="1400" b="1" i="0">
+                <a:solidFill>
+                  <a:srgbClr val="F2B705"/>
+                </a:solidFill>
+                <a:latin typeface="Malgun Gothic"/>
+                <a:ea typeface="Malgun Gothic"/>
+                <a:cs typeface="Malgun Gothic"/>
+              </a:rPr>
+              <a:t>•  </a:t>
+            </a:r>
+            <a:r>
+              <a:rPr sz="1400" b="0" i="0">
+                <a:solidFill>
+                  <a:srgbClr val="11202B"/>
+                </a:solidFill>
+                <a:latin typeface="Malgun Gothic"/>
+                <a:ea typeface="Malgun Gothic"/>
+                <a:cs typeface="Malgun Gothic"/>
+              </a:rPr>
+              <a:t>3. 지방산 acyl-CoA가 아미노기에 붙어 dihydroceramide가 된다.</a:t>
+            </a:r>
+          </a:p>
+          <a:p>
+            <a:pPr>
+              <a:spcAft>
+                <a:spcPts val="900"/>
+              </a:spcAft>
+            </a:pPr>
+            <a:r>
+              <a:rPr sz="1400" b="1" i="0">
+                <a:solidFill>
+                  <a:srgbClr val="F2B705"/>
+                </a:solidFill>
+                <a:latin typeface="Malgun Gothic"/>
+                <a:ea typeface="Malgun Gothic"/>
+                <a:cs typeface="Malgun Gothic"/>
+              </a:rPr>
+              <a:t>•  </a:t>
+            </a:r>
+            <a:r>
+              <a:rPr sz="1400" b="0" i="0">
+                <a:solidFill>
+                  <a:srgbClr val="11202B"/>
+                </a:solidFill>
+                <a:latin typeface="Malgun Gothic"/>
+                <a:ea typeface="Malgun Gothic"/>
+                <a:cs typeface="Malgun Gothic"/>
+              </a:rPr>
+              <a:t>4. FAD 의존 desaturase가 이중결합을 넣어 </a:t>
             </a:r>
             <a:r>
               <a:rPr sz="1400" b="1" i="0">
